--- a/docs/EduLab-pitch.pptx
+++ b/docs/EduLab-pitch.pptx
@@ -113,37 +113,37 @@
   <p:extLst>
     <p:ext uri="{521415D9-36F7-43E2-AB2F-B90AF26B5E84}">
       <p14:sectionLst xmlns:p14="http://schemas.microsoft.com/office/powerpoint/2010/main">
-        <p14:section name="Танилцуулга" id="{e322ac06-ac9f-7704-9457-87df8f502f74}">
+        <p14:section name="Танилцуулга" id="{f8f325bf-c443-572d-1abe-dff51c6a8889}">
           <p14:sldIdLst>
             <p14:sldId id="256"/>
           </p14:sldIdLst>
         </p14:section>
-        <p14:section name="Асуудал" id="{fde189df-72e2-2c15-8568-1c67204663ac}">
+        <p14:section name="Асуудал" id="{4c1dd62d-751b-9496-e24a-118f50fc451d}">
           <p14:sldIdLst>
             <p14:sldId id="257"/>
           </p14:sldIdLst>
         </p14:section>
-        <p14:section name="Шийдэл" id="{cdd87e8c-0a71-6146-ffef-170522e21a53}">
+        <p14:section name="Шийдэл" id="{a50ebe6e-5075-38d8-424e-807cb0cdc3ba}">
           <p14:sldIdLst>
             <p14:sldId id="258"/>
           </p14:sldIdLst>
         </p14:section>
-        <p14:section name="Demo" id="{fa48f7e2-b019-6911-e6a2-1197efa856a3}">
+        <p14:section name="Demo" id="{04206bec-e7ea-b222-d874-16aafdcfc51c}">
           <p14:sldIdLst>
             <p14:sldId id="259"/>
           </p14:sldIdLst>
         </p14:section>
-        <p14:section name="erxes интеграц" id="{229a65af-066e-6df4-39d9-16a0845b711c}">
+        <p14:section name="erxes интеграц" id="{b6bcd999-80f5-ce26-0160-f0db50e65f45}">
           <p14:sldIdLst>
             <p14:sldId id="260"/>
           </p14:sldIdLst>
         </p14:section>
-        <p14:section name="Техникийн шийдэл" id="{10e89f2d-07e3-dd9e-07f9-252500af7a3b}">
+        <p14:section name="Техникийн шийдэл" id="{37d34106-92f8-66ab-b0c3-3452e28b05ed}">
           <p14:sldIdLst>
             <p14:sldId id="261"/>
           </p14:sldIdLst>
         </p14:section>
-        <p14:section name="Дараагийн алхам" id="{80f65bc6-8cce-6a7a-77eb-30f0d37fb1fe}">
+        <p14:section name="Дараагийн алхам" id="{ce15d247-4ee7-998e-0768-651f3acdbdfc}">
           <p14:sldIdLst>
             <p14:sldId id="262"/>
           </p14:sldIdLst>
@@ -816,7 +816,7 @@
           <a:p>
             <a:r>
               <a:rPr lang="en-US" dirty="0"/>
-              <a:t>[1:05–2:00] (Видеог тоглуулна, ~55 сек.) Энд багш 12б ангид титрлэлтийн даалгавар өгсөн. Сурагч нэрээ сонгоод таамаглалаа бичнэ. Колбонд концентраци нь тодорхойгүй давсны хүчил байна. Ерөнхий slider-аар NaOH нэмэхэд эквивалент цэгт ойртлоо гэсэн сануулга гарна. Одоо нарийн slider-аар дусал дуслаар — pH 7, дараагийн ганц дусал цайвар ягаан. Гурван удаа давтаад концентрацийг 0.1032 моль/л гэж тооцоолоод илгээнэ. Gemma 4 шалгуур бүрээр задлаад 10 оноо санал болгосон. Мөн дүүжин, Омын хуулийн lab байгаа.</a:t>
+              <a:t>[1:05–2:00] (Видеог тоглуулна, ~52 сек.) Багшийн самбараас эхэлье. Даалгаврууд ангид оноогдсон. Багш нар нь erxes-ийн хэрэглэгч, анги бүрт багш оноогдоно. Сурагч бүр erxes Contacts-ийн харилцагчтай холбогдсон — эцэг эхтэй нь CRM-ээр харилцана. Багш шинэ даалгавар үүсгэхдээ lab-аа сонгож, үнэлгээний шалгуураа оноотойгоор бичнэ. Даалгаврын хуудсанд илгээлт бүр AI оноотойгоо орж ирнэ. Сурагч талд: таамаглал, титрлэлт — ганц дусал цайвар ягаан, дүгнэлт. Илгээмэгц Gemma 4 10 оноо санал болгосон. Багш хэмжилт, графикийг харж, шалгуур бүрийн тайлбарыг уншаад «Ашиглах» дарахад оноо, тайлбар бөглөгдөнө — эцсийн батлалт багшийнх. Мөн дүүжин, Омын хуулийн lab байгаа.</a:t>
             </a:r>
             <a:endParaRPr lang="en-US" dirty="0"/>
           </a:p>
@@ -3357,7 +3357,7 @@
                   <a:schemeClr val="tx1"/>
                 </a:solidFill>
               </a:rPr>
-              <a:t>Титрлэлт хийгээд AI-аас 10/10</a:t>
+              <a:t>Багш даалгавар өгнө, AI шалгана</a:t>
             </a:r>
             <a:endParaRPr lang="en-US" sz="3000" dirty="0"/>
           </a:p>
@@ -3487,7 +3487,7 @@
                   <a:schemeClr val="tx1"/>
                 </a:solidFill>
               </a:rPr>
-              <a:t>Анги, сурагч, даалгавар</a:t>
+              <a:t>Багш, анги, сурагч</a:t>
             </a:r>
             <a:endParaRPr lang="en-US" sz="1200" dirty="0"/>
           </a:p>
@@ -3584,7 +3584,7 @@
                   <a:schemeClr val="tx1"/>
                 </a:solidFill>
               </a:rPr>
-              <a:t>«Ерөнхий» slider-аар ойртох</a:t>
+              <a:t>erxes Contacts холбоос</a:t>
             </a:r>
             <a:endParaRPr lang="en-US" sz="1200" dirty="0"/>
           </a:p>
@@ -3681,7 +3681,7 @@
                   <a:schemeClr val="tx1"/>
                 </a:solidFill>
               </a:rPr>
-              <a:t>«Нарийн» slider: дусал дуслаар</a:t>
+              <a:t>Даалгавар + шалгуур</a:t>
             </a:r>
             <a:endParaRPr lang="en-US" sz="1200" dirty="0"/>
           </a:p>
@@ -3778,7 +3778,7 @@
                   <a:schemeClr val="tx1"/>
                 </a:solidFill>
               </a:rPr>
-              <a:t>Цайвар ягаан → хадгалах ×3</a:t>
+              <a:t>Сурагч: титрлэлт</a:t>
             </a:r>
             <a:endParaRPr lang="en-US" sz="1200" dirty="0"/>
           </a:p>
@@ -3972,7 +3972,7 @@
                   <a:schemeClr val="tx1"/>
                 </a:solidFill>
               </a:rPr>
-              <a:t>Дүүжин, Омын хууль</a:t>
+              <a:t>Багш хянаж батална</a:t>
             </a:r>
             <a:endParaRPr lang="en-US" sz="1200" dirty="0"/>
           </a:p>
